--- a/docs/chatbot_release_20261007/저학년의_반란_프로젝트_마일스톤_v1.1_20261007.pptx
+++ b/docs/chatbot_release_20261007/저학년의_반란_프로젝트_마일스톤_v1.1_20261007.pptx
@@ -535,7 +535,7 @@
               <a:buNone/>
             </a:pPr>
             <a:r>
-              <a:t>평가: /Users/jwlee/study1/aisw/docs/campusmate_evaluation_baseline.md</a:t>
+              <a:t>평가: /Users/jwlee/study1/aisw/docs/campusrag_evaluation_baseline.md</a:t>
             </a:r>
             <a:endParaRPr/>
           </a:p>
@@ -550,7 +550,7 @@
               <a:buNone/>
             </a:pPr>
             <a:r>
-              <a:t>배포: /Users/jwlee/study1/aisw/docs/campusmate_local_container_guide.md</a:t>
+              <a:t>배포: /Users/jwlee/study1/aisw/docs/campusrag_local_container_guide.md</a:t>
             </a:r>
             <a:endParaRPr/>
           </a:p>
@@ -705,7 +705,7 @@
               <a:buNone/>
             </a:pPr>
             <a:r>
-              <a:t>평가: /Users/jwlee/study1/aisw/docs/campusmate_evaluation_baseline.md</a:t>
+              <a:t>평가: /Users/jwlee/study1/aisw/docs/campusrag_evaluation_baseline.md</a:t>
             </a:r>
             <a:endParaRPr/>
           </a:p>
@@ -720,7 +720,7 @@
               <a:buNone/>
             </a:pPr>
             <a:r>
-              <a:t>배포: /Users/jwlee/study1/aisw/docs/campusmate_local_container_guide.md</a:t>
+              <a:t>배포: /Users/jwlee/study1/aisw/docs/campusrag_local_container_guide.md</a:t>
             </a:r>
             <a:endParaRPr/>
           </a:p>
@@ -2233,7 +2233,7 @@
                 <a:ea typeface="Nanum Gothic"/>
                 <a:cs typeface="Nanum Gothic"/>
               </a:rPr>
-              <a:t>CampusMate 프로젝트 마일스톤</a:t>
+              <a:t>CampusRAG 프로젝트 마일스톤</a:t>
             </a:r>
           </a:p>
         </p:txBody>
@@ -3229,7 +3229,7 @@
                 <a:ea typeface="Nanum Gothic"/>
                 <a:cs typeface="Nanum Gothic"/>
               </a:rPr>
-              <a:t>CampusMate 영역별 작업</a:t>
+              <a:t>CampusRAG 영역별 작업</a:t>
             </a:r>
           </a:p>
         </p:txBody>
